--- a/docs/FabCanvas_flow_intro.pptx
+++ b/docs/FabCanvas_flow_intro.pptx
@@ -3530,11 +3530,11 @@
         <p:spPr>
           <a:xfrm>
             <a:off x="548640" y="1371600"/>
-            <a:ext cx="5577840" cy="4937760"/>
+            <a:ext cx="5577840" cy="4206240"/>
           </a:xfrm>
           <a:prstGeom prst="roundRect">
             <a:avLst>
-              <a:gd name="adj" fmla="val 1481"/>
+              <a:gd name="adj" fmla="val 1739"/>
             </a:avLst>
           </a:prstGeom>
           <a:solidFill>
@@ -4189,11 +4189,11 @@
         <p:spPr>
           <a:xfrm>
             <a:off x="6309360" y="1371600"/>
-            <a:ext cx="5394960" cy="4937760"/>
+            <a:ext cx="5394960" cy="4206240"/>
           </a:xfrm>
           <a:prstGeom prst="roundRect">
             <a:avLst>
-              <a:gd name="adj" fmla="val 1481"/>
+              <a:gd name="adj" fmla="val 1739"/>
             </a:avLst>
           </a:prstGeom>
           <a:solidFill>
@@ -4858,193 +4858,180 @@
       </p:sp>
       <p:sp>
         <p:nvSpPr>
-          <p:cNvPr id="43" name="Text 41"/>
-          <p:cNvSpPr/>
-          <p:nvPr/>
-        </p:nvSpPr>
-        <p:spPr>
-          <a:xfrm>
-            <a:off x="548640" y="6382512"/>
-            <a:ext cx="11155680" cy="274320"/>
-          </a:xfrm>
-          <a:prstGeom prst="rect">
-            <a:avLst/>
-          </a:prstGeom>
-          <a:noFill/>
-          <a:ln/>
-        </p:spPr>
-        <p:txBody>
-          <a:bodyPr wrap="square" rtlCol="0" anchor="ctr"/>
-          <a:lstStyle/>
-          <a:p>
-            <a:pPr algn="l" indent="0" marL="0">
-              <a:buNone/>
-            </a:pPr>
-            <a:r>
-              <a:rPr lang="en-US" sz="1000" b="1" dirty="0">
-                <a:solidFill>
-                  <a:srgbClr val="7FB8D3"/>
+          <p:cNvPr id="43" name="Shape 41"/>
+          <p:cNvSpPr/>
+          <p:nvPr/>
+        </p:nvSpPr>
+        <p:spPr>
+          <a:xfrm>
+            <a:off x="548640" y="5669280"/>
+            <a:ext cx="11155680" cy="502920"/>
+          </a:xfrm>
+          <a:prstGeom prst="roundRect">
+            <a:avLst>
+              <a:gd name="adj" fmla="val 10909"/>
+            </a:avLst>
+          </a:prstGeom>
+          <a:solidFill>
+            <a:srgbClr val="065A82"/>
+          </a:solidFill>
+          <a:ln w="12700">
+            <a:solidFill>
+              <a:srgbClr val="1C7293"/>
+            </a:solidFill>
+            <a:prstDash val="solid"/>
+          </a:ln>
+        </p:spPr>
+      </p:sp>
+      <p:sp>
+        <p:nvSpPr>
+          <p:cNvPr id="44" name="Text 42"/>
+          <p:cNvSpPr/>
+          <p:nvPr/>
+        </p:nvSpPr>
+        <p:spPr>
+          <a:xfrm>
+            <a:off x="548640" y="5669280"/>
+            <a:ext cx="11155680" cy="502920"/>
+          </a:xfrm>
+          <a:prstGeom prst="rect">
+            <a:avLst/>
+          </a:prstGeom>
+          <a:noFill/>
+          <a:ln/>
+        </p:spPr>
+        <p:txBody>
+          <a:bodyPr wrap="square" rtlCol="0" anchor="ctr"/>
+          <a:lstStyle/>
+          <a:p>
+            <a:pPr algn="ctr" indent="0" marL="0">
+              <a:buNone/>
+            </a:pPr>
+            <a:r>
+              <a:rPr lang="en-US" sz="1250" b="1" dirty="0">
+                <a:solidFill>
+                  <a:srgbClr val="FFFFFF"/>
                 </a:solidFill>
                 <a:latin typeface="Segoe UI" pitchFamily="34" charset="0"/>
                 <a:ea typeface="Segoe UI" pitchFamily="34" charset="-122"/>
                 <a:cs typeface="Segoe UI" pitchFamily="34" charset="-120"/>
               </a:rPr>
-              <a:t>⚙ 기술 스택: </a:t>
-            </a:r>
-            <a:pPr algn="l" indent="0" marL="0">
-              <a:buNone/>
-            </a:pPr>
-            <a:r>
-              <a:rPr lang="en-US" sz="1000" b="1" dirty="0">
-                <a:solidFill>
-                  <a:srgbClr val="E8EEF5"/>
+              <a:t>⚡ </a:t>
+            </a:r>
+            <a:pPr algn="ctr" indent="0" marL="0">
+              <a:buNone/>
+            </a:pPr>
+            <a:r>
+              <a:rPr lang="en-US" sz="1250" b="1" dirty="0">
+                <a:solidFill>
+                  <a:srgbClr val="FFFFFF"/>
                 </a:solidFill>
                 <a:latin typeface="Segoe UI" pitchFamily="34" charset="0"/>
                 <a:ea typeface="Segoe UI" pitchFamily="34" charset="-122"/>
                 <a:cs typeface="Segoe UI" pitchFamily="34" charset="-120"/>
               </a:rPr>
-              <a:t>React</a:t>
-            </a:r>
-            <a:pPr algn="l" indent="0" marL="0">
-              <a:buNone/>
-            </a:pPr>
-            <a:r>
-              <a:rPr lang="en-US" sz="1000" dirty="0">
-                <a:solidFill>
-                  <a:srgbClr val="9FB3C8"/>
+              <a:t>총 36,757줄 · 약 196만 자</a:t>
+            </a:r>
+            <a:pPr algn="ctr" indent="0" marL="0">
+              <a:buNone/>
+            </a:pPr>
+            <a:r>
+              <a:rPr lang="en-US" sz="1250" dirty="0">
+                <a:solidFill>
+                  <a:srgbClr val="7FB8D3"/>
                 </a:solidFill>
                 <a:latin typeface="Segoe UI" pitchFamily="34" charset="0"/>
                 <a:ea typeface="Segoe UI" pitchFamily="34" charset="-122"/>
                 <a:cs typeface="Segoe UI" pitchFamily="34" charset="-120"/>
               </a:rPr>
-              <a:t>(프론트엔드) + </a:t>
-            </a:r>
-            <a:pPr algn="l" indent="0" marL="0">
-              <a:buNone/>
-            </a:pPr>
-            <a:r>
-              <a:rPr lang="en-US" sz="1000" b="1" dirty="0">
-                <a:solidFill>
-                  <a:srgbClr val="E8EEF5"/>
+              <a:t>  ·  </a:t>
+            </a:r>
+            <a:pPr algn="ctr" indent="0" marL="0">
+              <a:buNone/>
+            </a:pPr>
+            <a:r>
+              <a:rPr lang="en-US" sz="1250" b="1" dirty="0">
+                <a:solidFill>
+                  <a:srgbClr val="FFFFFF"/>
                 </a:solidFill>
                 <a:latin typeface="Segoe UI" pitchFamily="34" charset="0"/>
                 <a:ea typeface="Segoe UI" pitchFamily="34" charset="-122"/>
                 <a:cs typeface="Segoe UI" pitchFamily="34" charset="-120"/>
               </a:rPr>
-              <a:t>FastAPI</a:t>
-            </a:r>
-            <a:pPr algn="l" indent="0" marL="0">
-              <a:buNone/>
-            </a:pPr>
-            <a:r>
-              <a:rPr lang="en-US" sz="1000" dirty="0">
-                <a:solidFill>
-                  <a:srgbClr val="9FB3C8"/>
+              <a:t>Claude AI 협업으로 약 2주 만에 구축</a:t>
+            </a:r>
+            <a:pPr algn="ctr" indent="0" marL="0">
+              <a:buNone/>
+            </a:pPr>
+            <a:r>
+              <a:rPr lang="en-US" sz="1250" dirty="0">
+                <a:solidFill>
+                  <a:srgbClr val="7FB8D3"/>
                 </a:solidFill>
                 <a:latin typeface="Segoe UI" pitchFamily="34" charset="0"/>
                 <a:ea typeface="Segoe UI" pitchFamily="34" charset="-122"/>
                 <a:cs typeface="Segoe UI" pitchFamily="34" charset="-120"/>
               </a:rPr>
-              <a:t>(백엔드 API) + </a:t>
-            </a:r>
+              <a:t>    일반 SI 외주 시 약 1억원 · 6~8개월 소요 예상</a:t>
+            </a:r>
+            <a:endParaRPr lang="en-US" sz="1250" dirty="0"/>
+          </a:p>
+        </p:txBody>
+      </p:sp>
+      <p:sp>
+        <p:nvSpPr>
+          <p:cNvPr id="45" name="Text 43"/>
+          <p:cNvSpPr/>
+          <p:nvPr/>
+        </p:nvSpPr>
+        <p:spPr>
+          <a:xfrm>
+            <a:off x="548640" y="6236208"/>
+            <a:ext cx="11155680" cy="228600"/>
+          </a:xfrm>
+          <a:prstGeom prst="rect">
+            <a:avLst/>
+          </a:prstGeom>
+          <a:noFill/>
+          <a:ln/>
+        </p:spPr>
+        <p:txBody>
+          <a:bodyPr wrap="square" rtlCol="0" anchor="ctr"/>
+          <a:lstStyle/>
+          <a:p>
             <a:pPr algn="l" indent="0" marL="0">
               <a:buNone/>
             </a:pPr>
             <a:r>
-              <a:rPr lang="en-US" sz="1000" b="1" dirty="0">
-                <a:solidFill>
-                  <a:srgbClr val="E8EEF5"/>
+              <a:rPr lang="en-US" sz="950" b="1" dirty="0">
+                <a:solidFill>
+                  <a:srgbClr val="7FB8D3"/>
                 </a:solidFill>
                 <a:latin typeface="Segoe UI" pitchFamily="34" charset="0"/>
                 <a:ea typeface="Segoe UI" pitchFamily="34" charset="-122"/>
                 <a:cs typeface="Segoe UI" pitchFamily="34" charset="-120"/>
               </a:rPr>
-              <a:t>Polars</a:t>
+              <a:t>⚙ 기술 스택: </a:t>
             </a:r>
             <a:pPr algn="l" indent="0" marL="0">
               <a:buNone/>
             </a:pPr>
             <a:r>
-              <a:rPr lang="en-US" sz="1000" dirty="0">
-                <a:solidFill>
-                  <a:srgbClr val="9FB3C8"/>
+              <a:rPr lang="en-US" sz="950" b="1" dirty="0">
+                <a:solidFill>
+                  <a:srgbClr val="E8EEF5"/>
                 </a:solidFill>
                 <a:latin typeface="Segoe UI" pitchFamily="34" charset="0"/>
                 <a:ea typeface="Segoe UI" pitchFamily="34" charset="-122"/>
                 <a:cs typeface="Segoe UI" pitchFamily="34" charset="-120"/>
               </a:rPr>
-              <a:t>(고속 데이터 처리) · 사내망 전용 서비스</a:t>
-            </a:r>
-            <a:endParaRPr lang="en-US" sz="1000" dirty="0"/>
-          </a:p>
-        </p:txBody>
-      </p:sp>
-      <p:sp>
-        <p:nvSpPr>
-          <p:cNvPr id="44" name="Shape 42"/>
-          <p:cNvSpPr/>
-          <p:nvPr/>
-        </p:nvSpPr>
-        <p:spPr>
-          <a:xfrm>
-            <a:off x="0" y="0"/>
-            <a:ext cx="12188952" cy="73152"/>
-          </a:xfrm>
-          <a:prstGeom prst="rect">
-            <a:avLst/>
-          </a:prstGeom>
-          <a:solidFill>
-            <a:srgbClr val="065A82"/>
-          </a:solidFill>
-          <a:ln/>
-        </p:spPr>
-      </p:sp>
-      <p:sp>
-        <p:nvSpPr>
-          <p:cNvPr id="45" name="Shape 43"/>
-          <p:cNvSpPr/>
-          <p:nvPr/>
-        </p:nvSpPr>
-        <p:spPr>
-          <a:xfrm>
-            <a:off x="0" y="73152"/>
-            <a:ext cx="4114800" cy="36576"/>
-          </a:xfrm>
-          <a:prstGeom prst="rect">
-            <a:avLst/>
-          </a:prstGeom>
-          <a:solidFill>
-            <a:srgbClr val="1C7293"/>
-          </a:solidFill>
-          <a:ln/>
-        </p:spPr>
-      </p:sp>
-      <p:sp>
-        <p:nvSpPr>
-          <p:cNvPr id="46" name="Text 44"/>
-          <p:cNvSpPr/>
-          <p:nvPr/>
-        </p:nvSpPr>
-        <p:spPr>
-          <a:xfrm>
-            <a:off x="457200" y="6537960"/>
-            <a:ext cx="7315200" cy="228600"/>
-          </a:xfrm>
-          <a:prstGeom prst="rect">
-            <a:avLst/>
-          </a:prstGeom>
-          <a:noFill/>
-          <a:ln/>
-        </p:spPr>
-        <p:txBody>
-          <a:bodyPr wrap="square" rtlCol="0" anchor="ctr"/>
-          <a:lstStyle/>
-          <a:p>
-            <a:pPr indent="0" marL="0">
-              <a:buNone/>
-            </a:pPr>
-            <a:r>
-              <a:rPr lang="en-US" sz="900" dirty="0">
+              <a:t>React</a:t>
+            </a:r>
+            <a:pPr algn="l" indent="0" marL="0">
+              <a:buNone/>
+            </a:pPr>
+            <a:r>
+              <a:rPr lang="en-US" sz="950" dirty="0">
                 <a:solidFill>
                   <a:srgbClr val="9FB3C8"/>
                 </a:solidFill>
@@ -5052,6 +5039,141 @@
                 <a:ea typeface="Segoe UI" pitchFamily="34" charset="-122"/>
                 <a:cs typeface="Segoe UI" pitchFamily="34" charset="-120"/>
               </a:rPr>
+              <a:t>(프론트엔드) + </a:t>
+            </a:r>
+            <a:pPr algn="l" indent="0" marL="0">
+              <a:buNone/>
+            </a:pPr>
+            <a:r>
+              <a:rPr lang="en-US" sz="950" b="1" dirty="0">
+                <a:solidFill>
+                  <a:srgbClr val="E8EEF5"/>
+                </a:solidFill>
+                <a:latin typeface="Segoe UI" pitchFamily="34" charset="0"/>
+                <a:ea typeface="Segoe UI" pitchFamily="34" charset="-122"/>
+                <a:cs typeface="Segoe UI" pitchFamily="34" charset="-120"/>
+              </a:rPr>
+              <a:t>FastAPI</a:t>
+            </a:r>
+            <a:pPr algn="l" indent="0" marL="0">
+              <a:buNone/>
+            </a:pPr>
+            <a:r>
+              <a:rPr lang="en-US" sz="950" dirty="0">
+                <a:solidFill>
+                  <a:srgbClr val="9FB3C8"/>
+                </a:solidFill>
+                <a:latin typeface="Segoe UI" pitchFamily="34" charset="0"/>
+                <a:ea typeface="Segoe UI" pitchFamily="34" charset="-122"/>
+                <a:cs typeface="Segoe UI" pitchFamily="34" charset="-120"/>
+              </a:rPr>
+              <a:t>(백엔드 API) + </a:t>
+            </a:r>
+            <a:pPr algn="l" indent="0" marL="0">
+              <a:buNone/>
+            </a:pPr>
+            <a:r>
+              <a:rPr lang="en-US" sz="950" b="1" dirty="0">
+                <a:solidFill>
+                  <a:srgbClr val="E8EEF5"/>
+                </a:solidFill>
+                <a:latin typeface="Segoe UI" pitchFamily="34" charset="0"/>
+                <a:ea typeface="Segoe UI" pitchFamily="34" charset="-122"/>
+                <a:cs typeface="Segoe UI" pitchFamily="34" charset="-120"/>
+              </a:rPr>
+              <a:t>Polars</a:t>
+            </a:r>
+            <a:pPr algn="l" indent="0" marL="0">
+              <a:buNone/>
+            </a:pPr>
+            <a:r>
+              <a:rPr lang="en-US" sz="950" dirty="0">
+                <a:solidFill>
+                  <a:srgbClr val="9FB3C8"/>
+                </a:solidFill>
+                <a:latin typeface="Segoe UI" pitchFamily="34" charset="0"/>
+                <a:ea typeface="Segoe UI" pitchFamily="34" charset="-122"/>
+                <a:cs typeface="Segoe UI" pitchFamily="34" charset="-120"/>
+              </a:rPr>
+              <a:t>(고속 데이터 처리) · 사내망 전용 서비스</a:t>
+            </a:r>
+            <a:endParaRPr lang="en-US" sz="950" dirty="0"/>
+          </a:p>
+        </p:txBody>
+      </p:sp>
+      <p:sp>
+        <p:nvSpPr>
+          <p:cNvPr id="46" name="Shape 44"/>
+          <p:cNvSpPr/>
+          <p:nvPr/>
+        </p:nvSpPr>
+        <p:spPr>
+          <a:xfrm>
+            <a:off x="0" y="0"/>
+            <a:ext cx="12188952" cy="73152"/>
+          </a:xfrm>
+          <a:prstGeom prst="rect">
+            <a:avLst/>
+          </a:prstGeom>
+          <a:solidFill>
+            <a:srgbClr val="065A82"/>
+          </a:solidFill>
+          <a:ln/>
+        </p:spPr>
+      </p:sp>
+      <p:sp>
+        <p:nvSpPr>
+          <p:cNvPr id="47" name="Shape 45"/>
+          <p:cNvSpPr/>
+          <p:nvPr/>
+        </p:nvSpPr>
+        <p:spPr>
+          <a:xfrm>
+            <a:off x="0" y="73152"/>
+            <a:ext cx="4114800" cy="36576"/>
+          </a:xfrm>
+          <a:prstGeom prst="rect">
+            <a:avLst/>
+          </a:prstGeom>
+          <a:solidFill>
+            <a:srgbClr val="1C7293"/>
+          </a:solidFill>
+          <a:ln/>
+        </p:spPr>
+      </p:sp>
+      <p:sp>
+        <p:nvSpPr>
+          <p:cNvPr id="48" name="Text 46"/>
+          <p:cNvSpPr/>
+          <p:nvPr/>
+        </p:nvSpPr>
+        <p:spPr>
+          <a:xfrm>
+            <a:off x="457200" y="6537960"/>
+            <a:ext cx="7315200" cy="228600"/>
+          </a:xfrm>
+          <a:prstGeom prst="rect">
+            <a:avLst/>
+          </a:prstGeom>
+          <a:noFill/>
+          <a:ln/>
+        </p:spPr>
+        <p:txBody>
+          <a:bodyPr wrap="square" rtlCol="0" anchor="ctr"/>
+          <a:lstStyle/>
+          <a:p>
+            <a:pPr indent="0" marL="0">
+              <a:buNone/>
+            </a:pPr>
+            <a:r>
+              <a:rPr lang="en-US" sz="900" dirty="0">
+                <a:solidFill>
+                  <a:srgbClr val="9FB3C8"/>
+                </a:solidFill>
+                <a:latin typeface="Segoe UI" pitchFamily="34" charset="0"/>
+                <a:ea typeface="Segoe UI" pitchFamily="34" charset="-122"/>
+                <a:cs typeface="Segoe UI" pitchFamily="34" charset="-120"/>
+              </a:rPr>
               <a:t>FabCanvas.ai · flow v8.8.15</a:t>
             </a:r>
             <a:endParaRPr lang="en-US" sz="900" dirty="0"/>
@@ -5060,7 +5182,7 @@
       </p:sp>
       <p:sp>
         <p:nvSpPr>
-          <p:cNvPr id="47" name="Text 45"/>
+          <p:cNvPr id="49" name="Text 47"/>
           <p:cNvSpPr/>
           <p:nvPr/>
         </p:nvSpPr>
